--- a/1ST REVIEW.pptx
+++ b/1ST REVIEW.pptx
@@ -3669,8 +3669,8 @@
         </p:nvSpPr>
         <p:spPr>
           <a:xfrm>
-            <a:off x="603504" y="1668462"/>
-            <a:ext cx="11021052" cy="3785652"/>
+            <a:off x="284811" y="1668462"/>
+            <a:ext cx="11519625" cy="3970318"/>
           </a:xfrm>
           <a:prstGeom prst="rect">
             <a:avLst/>
@@ -3731,6 +3731,36 @@
                 <a:cs typeface="Calibri" panose="020F0502020204030204" pitchFamily="34" charset="0"/>
               </a:rPr>
               <a:t>POOJITHA D</a:t>
+            </a:r>
+          </a:p>
+          <a:p>
+            <a:pPr lvl="0" algn="ctr">
+              <a:defRPr/>
+            </a:pPr>
+            <a:r>
+              <a:rPr lang="en-US" sz="2400" b="1" dirty="0">
+                <a:solidFill>
+                  <a:prstClr val="white"/>
+                </a:solidFill>
+                <a:latin typeface="Frutiger 45 bold"/>
+                <a:cs typeface="Calibri" panose="020F0502020204030204" pitchFamily="34" charset="0"/>
+              </a:rPr>
+              <a:t>T10005</a:t>
+            </a:r>
+          </a:p>
+          <a:p>
+            <a:pPr lvl="0" algn="ctr">
+              <a:defRPr/>
+            </a:pPr>
+            <a:r>
+              <a:rPr lang="en-US" sz="2400" b="1" dirty="0">
+                <a:solidFill>
+                  <a:prstClr val="white"/>
+                </a:solidFill>
+                <a:latin typeface="Frutiger 45 bold"/>
+                <a:cs typeface="Calibri" panose="020F0502020204030204" pitchFamily="34" charset="0"/>
+              </a:rPr>
+              <a:t>VIT CHENNAI</a:t>
             </a:r>
             <a:endParaRPr lang="en-US" sz="5400" b="1" dirty="0">
               <a:solidFill>
@@ -4039,58 +4069,33 @@
       </p:pic>
       <p:pic>
         <p:nvPicPr>
-          <p:cNvPr id="9" name="Picture 2" descr="LTIMindtree - Technology Consulting and Digital Solutions Company">
+          <p:cNvPr id="2" name="Picture 1" descr="LTM GIFs on GIPHY - Be Animated">
             <a:extLst>
               <a:ext uri="{FF2B5EF4-FFF2-40B4-BE49-F238E27FC236}">
-                <a16:creationId xmlns:a16="http://schemas.microsoft.com/office/drawing/2014/main" id="{B3D78849-E5F7-1DB2-227F-14244586123F}"/>
+                <a16:creationId xmlns:a16="http://schemas.microsoft.com/office/drawing/2014/main" id="{AD2087CE-E53A-BC2D-73E9-3E6D9BFA9FDE}"/>
               </a:ext>
             </a:extLst>
           </p:cNvPr>
           <p:cNvPicPr>
-            <a:picLocks noChangeAspect="1" noChangeArrowheads="1"/>
+            <a:picLocks noChangeAspect="1"/>
           </p:cNvPicPr>
           <p:nvPr/>
         </p:nvPicPr>
         <p:blipFill>
-          <a:blip r:embed="rId3">
-            <a:extLst>
-              <a:ext uri="{BEBA8EAE-BF5A-486C-A8C5-ECC9F3942E4B}">
-                <a14:imgProps xmlns:a14="http://schemas.microsoft.com/office/drawing/2010/main">
-                  <a14:imgLayer r:embed="rId4">
-                    <a14:imgEffect>
-                      <a14:brightnessContrast bright="100000"/>
-                    </a14:imgEffect>
-                  </a14:imgLayer>
-                </a14:imgProps>
-              </a:ext>
-              <a:ext uri="{28A0092B-C50C-407E-A947-70E740481C1C}">
-                <a14:useLocalDpi xmlns:a14="http://schemas.microsoft.com/office/drawing/2010/main" val="0"/>
-              </a:ext>
-            </a:extLst>
-          </a:blip>
-          <a:srcRect/>
+          <a:blip r:embed="rId3"/>
+          <a:srcRect t="35458" b="34969"/>
           <a:stretch>
             <a:fillRect/>
           </a:stretch>
         </p:blipFill>
-        <p:spPr bwMode="auto">
+        <p:spPr>
           <a:xfrm>
-            <a:off x="0" y="5852667"/>
-            <a:ext cx="3886489" cy="864886"/>
+            <a:off x="-29980" y="6010971"/>
+            <a:ext cx="3007330" cy="889368"/>
           </a:xfrm>
           <a:prstGeom prst="rect">
             <a:avLst/>
           </a:prstGeom>
-          <a:noFill/>
-          <a:extLst>
-            <a:ext uri="{909E8E84-426E-40DD-AFC4-6F175D3DCCD1}">
-              <a14:hiddenFill xmlns:a14="http://schemas.microsoft.com/office/drawing/2010/main">
-                <a:solidFill>
-                  <a:srgbClr val="FFFFFF"/>
-                </a:solidFill>
-              </a14:hiddenFill>
-            </a:ext>
-          </a:extLst>
         </p:spPr>
       </p:pic>
     </p:spTree>
@@ -4578,7 +4583,7 @@
             </a:r>
             <a:r>
               <a:rPr lang="en-IN" b="0" dirty="0"/>
-              <a:t>Identifies significant shifts using PELT. </a:t>
+              <a:t>Identifies significant shifts using PELT, and Binary Segmentation. </a:t>
             </a:r>
           </a:p>
           <a:p>
@@ -4589,7 +4594,7 @@
             </a:r>
             <a:r>
               <a:rPr lang="en-IN" b="0" dirty="0"/>
-              <a:t>Compares Prophet with SARIMA.</a:t>
+              <a:t>Compares Prophet with Naïve Baseline.</a:t>
             </a:r>
           </a:p>
         </p:txBody>
@@ -5662,7 +5667,7 @@
             </a:r>
             <a:r>
               <a:rPr lang="en-IN" b="0" dirty="0"/>
-              <a:t> Retrieves relevant RBI circulars, notices, and news. </a:t>
+              <a:t> Retrieves relevant RBI documents. </a:t>
             </a:r>
           </a:p>
           <a:p>
@@ -5749,7 +5754,7 @@
                 <a:ea typeface="+mn-ea"/>
                 <a:cs typeface="+mn-cs"/>
               </a:rPr>
-              <a:t>RAG EXPLANATION LAYER</a:t>
+              <a:t>RAG Explanation Layer</a:t>
             </a:r>
           </a:p>
         </p:txBody>
@@ -5807,13 +5812,13 @@
   <p:clrMapOvr>
     <a:masterClrMapping/>
   </p:clrMapOvr>
-  <mc:AlternateContent xmlns:mc="http://schemas.openxmlformats.org/markup-compatibility/2006">
-    <mc:Choice xmlns:p159="http://schemas.microsoft.com/office/powerpoint/2015/09/main" Requires="p159">
+  <mc:AlternateContent xmlns:mc="http://schemas.openxmlformats.org/markup-compatibility/2006" xmlns:p159="http://schemas.microsoft.com/office/powerpoint/2015/09/main">
+    <mc:Choice Requires="p159">
       <p:transition xmlns:p14="http://schemas.microsoft.com/office/powerpoint/2010/main" spd="slow" p14:dur="2000">
         <p159:morph option="byObject"/>
       </p:transition>
     </mc:Choice>
-    <mc:Fallback>
+    <mc:Fallback xmlns="">
       <p:transition spd="slow">
         <p:fade/>
       </p:transition>
@@ -6405,7 +6410,7 @@
             </a:r>
             <a:r>
               <a:rPr lang="en-IN" b="0" dirty="0"/>
-              <a:t>Logs forecasts, MAPE, and model runs using </a:t>
+              <a:t>Logs forecasts, and model runs using </a:t>
             </a:r>
             <a:r>
               <a:rPr lang="en-IN" b="0" dirty="0" err="1"/>
@@ -7596,58 +7601,33 @@
       </p:pic>
       <p:pic>
         <p:nvPicPr>
-          <p:cNvPr id="9" name="Picture 2" descr="LTIMindtree - Technology Consulting and Digital Solutions Company">
+          <p:cNvPr id="5" name="Picture 4" descr="LTM GIFs on GIPHY - Be Animated">
             <a:extLst>
               <a:ext uri="{FF2B5EF4-FFF2-40B4-BE49-F238E27FC236}">
-                <a16:creationId xmlns:a16="http://schemas.microsoft.com/office/drawing/2014/main" id="{B3D78849-E5F7-1DB2-227F-14244586123F}"/>
+                <a16:creationId xmlns:a16="http://schemas.microsoft.com/office/drawing/2014/main" id="{A88C2434-EC0C-2840-FB5F-6C30A1168B94}"/>
               </a:ext>
             </a:extLst>
           </p:cNvPr>
           <p:cNvPicPr>
-            <a:picLocks noChangeAspect="1" noChangeArrowheads="1"/>
+            <a:picLocks noChangeAspect="1"/>
           </p:cNvPicPr>
           <p:nvPr/>
         </p:nvPicPr>
         <p:blipFill>
-          <a:blip r:embed="rId3">
-            <a:extLst>
-              <a:ext uri="{BEBA8EAE-BF5A-486C-A8C5-ECC9F3942E4B}">
-                <a14:imgProps xmlns:a14="http://schemas.microsoft.com/office/drawing/2010/main">
-                  <a14:imgLayer r:embed="rId4">
-                    <a14:imgEffect>
-                      <a14:brightnessContrast bright="100000"/>
-                    </a14:imgEffect>
-                  </a14:imgLayer>
-                </a14:imgProps>
-              </a:ext>
-              <a:ext uri="{28A0092B-C50C-407E-A947-70E740481C1C}">
-                <a14:useLocalDpi xmlns:a14="http://schemas.microsoft.com/office/drawing/2010/main" val="0"/>
-              </a:ext>
-            </a:extLst>
-          </a:blip>
-          <a:srcRect/>
+          <a:blip r:embed="rId3"/>
+          <a:srcRect t="35458" b="34969"/>
           <a:stretch>
             <a:fillRect/>
           </a:stretch>
         </p:blipFill>
-        <p:spPr bwMode="auto">
+        <p:spPr>
           <a:xfrm>
-            <a:off x="0" y="5852667"/>
-            <a:ext cx="3886489" cy="864886"/>
+            <a:off x="-14990" y="5995981"/>
+            <a:ext cx="3007330" cy="889368"/>
           </a:xfrm>
           <a:prstGeom prst="rect">
             <a:avLst/>
           </a:prstGeom>
-          <a:noFill/>
-          <a:extLst>
-            <a:ext uri="{909E8E84-426E-40DD-AFC4-6F175D3DCCD1}">
-              <a14:hiddenFill xmlns:a14="http://schemas.microsoft.com/office/drawing/2010/main">
-                <a:solidFill>
-                  <a:srgbClr val="FFFFFF"/>
-                </a:solidFill>
-              </a14:hiddenFill>
-            </a:ext>
-          </a:extLst>
         </p:spPr>
       </p:pic>
     </p:spTree>
@@ -9118,7 +9098,7 @@
             </a:r>
             <a:r>
               <a:rPr lang="en-IN" b="0" dirty="0"/>
-              <a:t>Extend the pipeline to pharmacy, convenience, and e-commerce retail.</a:t>
+              <a:t>Extend the pipeline to pharmacy, e-commerce retail, etc.</a:t>
             </a:r>
           </a:p>
         </p:txBody>
@@ -9857,7 +9837,7 @@
                         <a:buNone/>
                       </a:pPr>
                       <a:r>
-                        <a:rPr lang="en-IN" sz="1800">
+                        <a:rPr lang="en-IN" sz="1800" dirty="0">
                           <a:solidFill>
                             <a:srgbClr val="0070C0"/>
                           </a:solidFill>
@@ -11402,7 +11382,7 @@
             </a:r>
             <a:r>
               <a:rPr lang="en-IN" b="0" dirty="0"/>
-              <a:t>Most studies rely on RFM/transaction metrics.</a:t>
+              <a:t>Most studies rely on RFM (Recency, Frequency, and Monetary)/transaction metrics.</a:t>
             </a:r>
             <a:endParaRPr lang="en-IN" dirty="0"/>
           </a:p>
@@ -11410,7 +11390,15 @@
             <a:pPr lvl="0"/>
             <a:r>
               <a:rPr lang="en-IN" dirty="0"/>
-              <a:t>Lack of Semantic Features: Shopping mission, household orientation, and convenience </a:t>
+              <a:t>Lack of Semantic Features: </a:t>
+            </a:r>
+            <a:r>
+              <a:rPr lang="en-IN" b="0" dirty="0"/>
+              <a:t>Shopping mission, household orientation, and convenience</a:t>
+            </a:r>
+            <a:r>
+              <a:rPr lang="en-IN" dirty="0"/>
+              <a:t> </a:t>
             </a:r>
             <a:r>
               <a:rPr lang="en-IN" b="0" dirty="0"/>
@@ -12733,27 +12721,27 @@
             </a:r>
             <a:r>
               <a:rPr lang="en-IN" b="0" dirty="0"/>
-              <a:t>NPCI remitter-bank monthly UPI transaction data</a:t>
+              <a:t>Instacart Market Basket Analysis — 3M+ orders, 200K+ users (Kaggle)</a:t>
             </a:r>
           </a:p>
           <a:p>
             <a:r>
               <a:rPr lang="en-IN" dirty="0"/>
-              <a:t>Data Characteristics: </a:t>
+              <a:t>Live pipeline: </a:t>
             </a:r>
             <a:r>
               <a:rPr lang="en-IN" b="0" dirty="0"/>
-              <a:t>Customer-facing reliability metrics with month mismatches and duplicate records automatically handled</a:t>
+              <a:t>SQLite-based ingestion simulation with resumable cursor</a:t>
             </a:r>
           </a:p>
           <a:p>
             <a:r>
               <a:rPr lang="en-IN" dirty="0"/>
-              <a:t>Tech Stack: </a:t>
+              <a:t>Tech stack: </a:t>
             </a:r>
             <a:r>
               <a:rPr lang="en-IN" b="0" dirty="0"/>
-              <a:t>Python, Pandas, Prophet, SARIMA, Ruptures, Sentence-Transformers, </a:t>
+              <a:t>Python, Pandas, Scikit-learn, UMAP, </a:t>
             </a:r>
             <a:r>
               <a:rPr lang="en-IN" b="0" dirty="0" err="1"/>
@@ -12761,13 +12749,13 @@
             </a:r>
             <a:r>
               <a:rPr lang="en-IN" b="0" dirty="0"/>
-              <a:t>, SQLite, Power BI</a:t>
+              <a:t>, Power BI</a:t>
             </a:r>
           </a:p>
           <a:p>
             <a:r>
               <a:rPr lang="en-IN" dirty="0"/>
-              <a:t>Web Application: </a:t>
+              <a:t>Web application: </a:t>
             </a:r>
             <a:r>
               <a:rPr lang="en-IN" b="0" dirty="0" err="1"/>
@@ -12775,8 +12763,9 @@
             </a:r>
             <a:r>
               <a:rPr lang="en-IN" b="0" dirty="0"/>
-              <a:t>-based monitoring dashboard with RAG-powered explanations using RBI circulars, notices, and news</a:t>
-            </a:r>
+              <a:t> backend with secure login, signup, OTP verification</a:t>
+            </a:r>
+            <a:endParaRPr lang="en-IN" dirty="0"/>
           </a:p>
         </p:txBody>
       </p:sp>
@@ -14425,16 +14414,20 @@
               <a:t>LLM Tagging: </a:t>
             </a:r>
             <a:r>
-              <a:rPr lang="en-IN" b="0" dirty="0"/>
-              <a:t>GPT/Gemini/</a:t>
-            </a:r>
-            <a:r>
               <a:rPr lang="en-IN" b="0" dirty="0" err="1"/>
               <a:t>Ollama</a:t>
             </a:r>
             <a:r>
               <a:rPr lang="en-IN" b="0" dirty="0"/>
-              <a:t> classifies household, mission, convenience, and </a:t>
+              <a:t> classifies household, mission, </a:t>
+            </a:r>
+            <a:r>
+              <a:rPr lang="en-IN" b="0"/>
+              <a:t>convenience, </a:t>
+            </a:r>
+            <a:r>
+              <a:rPr lang="en-IN" b="0" dirty="0"/>
+              <a:t>and purchase </a:t>
             </a:r>
             <a:r>
               <a:rPr lang="en-IN" b="0" dirty="0" err="1"/>
@@ -14890,7 +14883,7 @@
             </a:r>
             <a:r>
               <a:rPr lang="en-IN" b="0" dirty="0"/>
-              <a:t> Applies K-Means, GMM, Hierarchical or DBSCAN. </a:t>
+              <a:t> Applies K-Means, GMM, Hierarchical clustering or DBSCAN. </a:t>
             </a:r>
           </a:p>
           <a:p>
@@ -19773,7 +19766,11 @@
             </a:r>
             <a:r>
               <a:rPr lang="en-IN" dirty="0"/>
-              <a:t> system reliability and technical failures. </a:t>
+              <a:t> </a:t>
+            </a:r>
+            <a:r>
+              <a:rPr lang="en-IN" b="0" dirty="0"/>
+              <a:t>system reliability and technical failures. </a:t>
             </a:r>
           </a:p>
           <a:p>
@@ -19788,7 +19785,11 @@
             </a:r>
             <a:r>
               <a:rPr lang="en-IN" dirty="0"/>
-              <a:t> bank-wise reliability index, trend analysis, and risk ranking. </a:t>
+              <a:t> </a:t>
+            </a:r>
+            <a:r>
+              <a:rPr lang="en-IN" b="0" dirty="0"/>
+              <a:t>bank-wise reliability index, trend analysis, and risk ranking. </a:t>
             </a:r>
           </a:p>
           <a:p>
@@ -19803,11 +19804,11 @@
             </a:r>
             <a:r>
               <a:rPr lang="en-IN" dirty="0"/>
-              <a:t> forecasting and change-point detection </a:t>
+              <a:t> </a:t>
             </a:r>
             <a:r>
               <a:rPr lang="en-IN" b="0" dirty="0"/>
-              <a:t>to identify emerging reliability deterioration.</a:t>
+              <a:t>forecasting and change-point detection to identify emerging reliability deterioration.</a:t>
             </a:r>
             <a:r>
               <a:rPr lang="en-IN" dirty="0"/>
@@ -19826,7 +19827,11 @@
             </a:r>
             <a:r>
               <a:rPr lang="en-IN" dirty="0"/>
-              <a:t> high-impact bank-level risks. </a:t>
+              <a:t> </a:t>
+            </a:r>
+            <a:r>
+              <a:rPr lang="en-IN" b="0" dirty="0"/>
+              <a:t>high-impact bank-level risks. </a:t>
             </a:r>
           </a:p>
         </p:txBody>
@@ -20278,122 +20283,63 @@
         </p:nvSpPr>
         <p:spPr>
           <a:xfrm>
-            <a:off x="1331675" y="2158188"/>
-            <a:ext cx="9528649" cy="2706420"/>
+            <a:off x="1331675" y="1708449"/>
+            <a:ext cx="9528649" cy="3957795"/>
           </a:xfrm>
         </p:spPr>
         <p:txBody>
           <a:bodyPr/>
           <a:lstStyle/>
           <a:p>
-            <a:pPr lvl="0"/>
-            <a:r>
-              <a:rPr lang="en-IN" b="0" dirty="0">
-                <a:latin typeface="+mn-lt"/>
-              </a:rPr>
-              <a:t>Data sourced directly from </a:t>
-            </a:r>
-            <a:r>
-              <a:rPr lang="en-IN" dirty="0">
-                <a:latin typeface="+mn-lt"/>
-              </a:rPr>
-              <a:t>NPCI</a:t>
-            </a:r>
-            <a:r>
-              <a:rPr lang="en-IN" b="0" dirty="0">
-                <a:latin typeface="+mn-lt"/>
-              </a:rPr>
-              <a:t>, real and free</a:t>
-            </a:r>
-          </a:p>
-          <a:p>
-            <a:pPr lvl="0"/>
-            <a:r>
-              <a:rPr lang="en-IN" b="0" dirty="0">
-                <a:latin typeface="+mn-lt"/>
-              </a:rPr>
-              <a:t>Remitter-bank data only, </a:t>
-            </a:r>
-            <a:r>
-              <a:rPr lang="en-IN" dirty="0">
-                <a:latin typeface="+mn-lt"/>
-              </a:rPr>
-              <a:t>customer-facing</a:t>
-            </a:r>
-            <a:r>
-              <a:rPr lang="en-IN" b="0" dirty="0">
-                <a:latin typeface="+mn-lt"/>
-              </a:rPr>
-              <a:t> reliability</a:t>
-            </a:r>
-          </a:p>
-          <a:p>
-            <a:pPr lvl="0"/>
-            <a:r>
-              <a:rPr lang="en-IN" b="0" dirty="0">
-                <a:latin typeface="+mn-lt"/>
-              </a:rPr>
-              <a:t>Filename vs. actual month </a:t>
-            </a:r>
-            <a:r>
-              <a:rPr lang="en-IN" dirty="0">
-                <a:latin typeface="+mn-lt"/>
-              </a:rPr>
-              <a:t>mismatches</a:t>
-            </a:r>
-            <a:r>
-              <a:rPr lang="en-IN" b="0" dirty="0">
-                <a:latin typeface="+mn-lt"/>
-              </a:rPr>
-              <a:t> identified and handled</a:t>
-            </a:r>
-          </a:p>
-          <a:p>
-            <a:pPr lvl="0"/>
-            <a:r>
-              <a:rPr lang="en-IN" b="0" dirty="0">
-                <a:latin typeface="+mn-lt"/>
-              </a:rPr>
-              <a:t>Duplicate/unpublished-month data </a:t>
-            </a:r>
-            <a:r>
-              <a:rPr lang="en-IN" dirty="0">
-                <a:latin typeface="+mn-lt"/>
-              </a:rPr>
-              <a:t>auto-detected </a:t>
-            </a:r>
-            <a:r>
-              <a:rPr lang="en-IN" b="0" dirty="0">
-                <a:latin typeface="+mn-lt"/>
-              </a:rPr>
-              <a:t>and skipped</a:t>
-            </a:r>
-          </a:p>
-          <a:p>
-            <a:pPr lvl="0" algn="just"/>
-            <a:r>
-              <a:rPr lang="en-IN" b="0" dirty="0">
-                <a:latin typeface="+mn-lt"/>
-              </a:rPr>
-              <a:t>Pipeline built in </a:t>
-            </a:r>
-            <a:r>
-              <a:rPr lang="en-IN" dirty="0">
-                <a:latin typeface="+mn-lt"/>
-              </a:rPr>
-              <a:t>Python</a:t>
-            </a:r>
-            <a:r>
-              <a:rPr lang="en-IN" b="0" dirty="0">
-                <a:latin typeface="+mn-lt"/>
-              </a:rPr>
-              <a:t>, stored in </a:t>
-            </a:r>
-            <a:r>
-              <a:rPr lang="en-IN" dirty="0">
-                <a:latin typeface="+mn-lt"/>
-              </a:rPr>
-              <a:t>SQLite</a:t>
+            <a:r>
+              <a:rPr lang="en-IN" dirty="0"/>
+              <a:t>Dataset: </a:t>
+            </a:r>
+            <a:r>
+              <a:rPr lang="en-IN" b="0" dirty="0"/>
+              <a:t>NPCI remitter-bank monthly UPI transaction data</a:t>
+            </a:r>
+          </a:p>
+          <a:p>
+            <a:r>
+              <a:rPr lang="en-IN" dirty="0"/>
+              <a:t>Data Characteristics: </a:t>
+            </a:r>
+            <a:r>
+              <a:rPr lang="en-IN" b="0" dirty="0"/>
+              <a:t>Customer-facing reliability metrics with month mismatches and duplicate records automatically handled</a:t>
+            </a:r>
+          </a:p>
+          <a:p>
+            <a:r>
+              <a:rPr lang="en-IN" dirty="0"/>
+              <a:t>Tech Stack: </a:t>
+            </a:r>
+            <a:r>
+              <a:rPr lang="en-IN" b="0" dirty="0"/>
+              <a:t>Python, Pandas, Prophet, PELT, Sentence-Transformers, </a:t>
+            </a:r>
+            <a:r>
+              <a:rPr lang="en-IN" b="0" dirty="0" err="1"/>
+              <a:t>MLflow</a:t>
+            </a:r>
+            <a:r>
+              <a:rPr lang="en-IN" b="0" dirty="0"/>
+              <a:t>, SQLite, Power BI</a:t>
+            </a:r>
+          </a:p>
+          <a:p>
+            <a:r>
+              <a:rPr lang="en-IN" dirty="0"/>
+              <a:t>Web Application: </a:t>
+            </a:r>
+            <a:r>
+              <a:rPr lang="en-IN" b="0" dirty="0" err="1"/>
+              <a:t>FastAPI</a:t>
+            </a:r>
+            <a:r>
+              <a:rPr lang="en-IN" b="0" dirty="0"/>
+              <a:t>-based monitoring dashboard with RAG-powered explanations using RBI circulars, notices, and news</a:t>
             </a:r>
           </a:p>
         </p:txBody>
@@ -20756,55 +20702,6 @@
                                           <p:spTgt spid="2">
                                             <p:txEl>
                                               <p:pRg st="3" end="3"/>
-                                            </p:txEl>
-                                          </p:spTgt>
-                                        </p:tgtEl>
-                                        <p:attrNameLst>
-                                          <p:attrName>style.visibility</p:attrName>
-                                        </p:attrNameLst>
-                                      </p:cBhvr>
-                                      <p:to>
-                                        <p:strVal val="visible"/>
-                                      </p:to>
-                                    </p:set>
-                                  </p:childTnLst>
-                                </p:cTn>
-                              </p:par>
-                            </p:childTnLst>
-                          </p:cTn>
-                        </p:par>
-                      </p:childTnLst>
-                    </p:cTn>
-                  </p:par>
-                  <p:par>
-                    <p:cTn id="19" fill="hold">
-                      <p:stCondLst>
-                        <p:cond delay="indefinite"/>
-                      </p:stCondLst>
-                      <p:childTnLst>
-                        <p:par>
-                          <p:cTn id="20" fill="hold">
-                            <p:stCondLst>
-                              <p:cond delay="0"/>
-                            </p:stCondLst>
-                            <p:childTnLst>
-                              <p:par>
-                                <p:cTn id="21" presetID="1" presetClass="entr" presetSubtype="0" fill="hold" grpId="0" nodeType="clickEffect">
-                                  <p:stCondLst>
-                                    <p:cond delay="0"/>
-                                  </p:stCondLst>
-                                  <p:childTnLst>
-                                    <p:set>
-                                      <p:cBhvr>
-                                        <p:cTn id="22" dur="1" fill="hold">
-                                          <p:stCondLst>
-                                            <p:cond delay="0"/>
-                                          </p:stCondLst>
-                                        </p:cTn>
-                                        <p:tgtEl>
-                                          <p:spTgt spid="2">
-                                            <p:txEl>
-                                              <p:pRg st="4" end="4"/>
                                             </p:txEl>
                                           </p:spTgt>
                                         </p:tgtEl>
